--- a/Fake News Detection Overview.pptx
+++ b/Fake News Detection Overview.pptx
@@ -9685,7 +9685,7 @@
                 <a:cs typeface="Calibri"/>
                 <a:sym typeface="Calibri"/>
               </a:rPr>
-              <a:t>Fake news often tries to manipulate with readers emotions . So sentiment analysis can help to detect  fake news .</a:t>
+              <a:t>Fake news often tries to manipulate with readers emotions. So sentiment analysis can help to detect fake news.</a:t>
             </a:r>
           </a:p>
           <a:p>
@@ -20040,7 +20040,7 @@
         </p:blipFill>
         <p:spPr>
           <a:xfrm>
-            <a:off x="12207525" y="2649563"/>
+            <a:off x="11434100" y="3297150"/>
             <a:ext cx="5295900" cy="5305425"/>
           </a:xfrm>
           <a:prstGeom prst="rect">
